--- a/classes/17-26-oct-coupling-mass-heat/slides/mass_heat_reaction.pptx
+++ b/classes/17-26-oct-coupling-mass-heat/slides/mass_heat_reaction.pptx
@@ -136,7 +136,7 @@
   <pc:docChgLst>
     <pc:chgData name="Frederik Rask Dalby" userId="12c7c68b-47c4-4858-a883-dbd84be7356f" providerId="ADAL" clId="{E9883B15-7D20-4C63-9A3F-08E95C9A44CC}"/>
     <pc:docChg chg="custSel modSld">
-      <pc:chgData name="Frederik Rask Dalby" userId="12c7c68b-47c4-4858-a883-dbd84be7356f" providerId="ADAL" clId="{E9883B15-7D20-4C63-9A3F-08E95C9A44CC}" dt="2026-10-26T07:41:30.177" v="60" actId="1037"/>
+      <pc:chgData name="Frederik Rask Dalby" userId="12c7c68b-47c4-4858-a883-dbd84be7356f" providerId="ADAL" clId="{E9883B15-7D20-4C63-9A3F-08E95C9A44CC}" dt="2026-10-26T12:26:31.220" v="68" actId="478"/>
       <pc:docMkLst>
         <pc:docMk/>
       </pc:docMkLst>
@@ -231,6 +231,29 @@
             <ac:spMk id="7" creationId="{E07C7248-9A8C-5630-B229-26F029EF70AA}"/>
           </ac:spMkLst>
         </pc:spChg>
+      </pc:sldChg>
+      <pc:sldChg chg="addSp delSp modSp mod">
+        <pc:chgData name="Frederik Rask Dalby" userId="12c7c68b-47c4-4858-a883-dbd84be7356f" providerId="ADAL" clId="{E9883B15-7D20-4C63-9A3F-08E95C9A44CC}" dt="2026-10-26T12:26:31.220" v="68" actId="478"/>
+        <pc:sldMkLst>
+          <pc:docMk/>
+          <pc:sldMk cId="379251194" sldId="264"/>
+        </pc:sldMkLst>
+        <pc:spChg chg="add mod">
+          <ac:chgData name="Frederik Rask Dalby" userId="12c7c68b-47c4-4858-a883-dbd84be7356f" providerId="ADAL" clId="{E9883B15-7D20-4C63-9A3F-08E95C9A44CC}" dt="2026-10-26T12:26:14.861" v="65" actId="208"/>
+          <ac:spMkLst>
+            <pc:docMk/>
+            <pc:sldMk cId="379251194" sldId="264"/>
+            <ac:spMk id="6" creationId="{461E41A9-83A8-6999-175A-AF534B9090FD}"/>
+          </ac:spMkLst>
+        </pc:spChg>
+        <pc:cxnChg chg="add del mod">
+          <ac:chgData name="Frederik Rask Dalby" userId="12c7c68b-47c4-4858-a883-dbd84be7356f" providerId="ADAL" clId="{E9883B15-7D20-4C63-9A3F-08E95C9A44CC}" dt="2026-10-26T12:26:31.220" v="68" actId="478"/>
+          <ac:cxnSpMkLst>
+            <pc:docMk/>
+            <pc:sldMk cId="379251194" sldId="264"/>
+            <ac:cxnSpMk id="4" creationId="{D6356266-B266-A8C2-44E8-294BBD2D9E74}"/>
+          </ac:cxnSpMkLst>
+        </pc:cxnChg>
       </pc:sldChg>
       <pc:sldChg chg="delSp mod">
         <pc:chgData name="Frederik Rask Dalby" userId="12c7c68b-47c4-4858-a883-dbd84be7356f" providerId="ADAL" clId="{E9883B15-7D20-4C63-9A3F-08E95C9A44CC}" dt="2026-10-26T07:25:33.422" v="1" actId="478"/>
@@ -4164,6 +4187,60 @@
           </a:prstGeom>
         </p:spPr>
       </p:pic>
+      <p:sp>
+        <p:nvSpPr>
+          <p:cNvPr id="6" name="Rectangle 5">
+            <a:extLst>
+              <a:ext uri="{FF2B5EF4-FFF2-40B4-BE49-F238E27FC236}">
+                <a16:creationId xmlns:a16="http://schemas.microsoft.com/office/drawing/2014/main" id="{461E41A9-83A8-6999-175A-AF534B9090FD}"/>
+              </a:ext>
+            </a:extLst>
+          </p:cNvPr>
+          <p:cNvSpPr/>
+          <p:nvPr/>
+        </p:nvSpPr>
+        <p:spPr>
+          <a:xfrm>
+            <a:off x="2128058" y="1911927"/>
+            <a:ext cx="199506" cy="249382"/>
+          </a:xfrm>
+          <a:prstGeom prst="rect">
+            <a:avLst/>
+          </a:prstGeom>
+          <a:solidFill>
+            <a:schemeClr val="bg1"/>
+          </a:solidFill>
+          <a:ln>
+            <a:solidFill>
+              <a:schemeClr val="bg1"/>
+            </a:solidFill>
+          </a:ln>
+        </p:spPr>
+        <p:style>
+          <a:lnRef idx="2">
+            <a:schemeClr val="accent1">
+              <a:shade val="15000"/>
+            </a:schemeClr>
+          </a:lnRef>
+          <a:fillRef idx="1">
+            <a:schemeClr val="accent1"/>
+          </a:fillRef>
+          <a:effectRef idx="0">
+            <a:schemeClr val="accent1"/>
+          </a:effectRef>
+          <a:fontRef idx="minor">
+            <a:schemeClr val="lt1"/>
+          </a:fontRef>
+        </p:style>
+        <p:txBody>
+          <a:bodyPr rtlCol="0" anchor="ctr"/>
+          <a:lstStyle/>
+          <a:p>
+            <a:pPr algn="ctr"/>
+            <a:endParaRPr lang="da-DK"/>
+          </a:p>
+        </p:txBody>
+      </p:sp>
     </p:spTree>
     <p:extLst>
       <p:ext uri="{BB962C8B-B14F-4D97-AF65-F5344CB8AC3E}">
@@ -4904,8 +4981,8 @@
           </a:p>
         </p:txBody>
       </p:sp>
-      <mc:AlternateContent xmlns:mc="http://schemas.openxmlformats.org/markup-compatibility/2006">
-        <mc:Choice xmlns:a14="http://schemas.microsoft.com/office/drawing/2010/main" Requires="a14">
+      <mc:AlternateContent xmlns:mc="http://schemas.openxmlformats.org/markup-compatibility/2006" xmlns:a14="http://schemas.microsoft.com/office/drawing/2010/main">
+        <mc:Choice Requires="a14">
           <p:sp>
             <p:nvSpPr>
               <p:cNvPr id="6" name="TextBox 5">
@@ -4999,7 +5076,7 @@
             </p:txBody>
           </p:sp>
         </mc:Choice>
-        <mc:Fallback>
+        <mc:Fallback xmlns="">
           <p:sp>
             <p:nvSpPr>
               <p:cNvPr id="6" name="TextBox 5">
@@ -7977,8 +8054,8 @@
           </a:p>
         </p:txBody>
       </p:sp>
-      <mc:AlternateContent xmlns:mc="http://schemas.openxmlformats.org/markup-compatibility/2006">
-        <mc:Choice xmlns:a14="http://schemas.microsoft.com/office/drawing/2010/main" Requires="a14">
+      <mc:AlternateContent xmlns:mc="http://schemas.openxmlformats.org/markup-compatibility/2006" xmlns:a14="http://schemas.microsoft.com/office/drawing/2010/main">
+        <mc:Choice Requires="a14">
           <p:sp>
             <p:nvSpPr>
               <p:cNvPr id="15" name="TextBox 14">
@@ -8090,7 +8167,7 @@
             </p:txBody>
           </p:sp>
         </mc:Choice>
-        <mc:Fallback>
+        <mc:Fallback xmlns="">
           <p:sp>
             <p:nvSpPr>
               <p:cNvPr id="15" name="TextBox 14">
@@ -9033,8 +9110,8 @@
           </p:sp>
         </mc:Fallback>
       </mc:AlternateContent>
-      <mc:AlternateContent xmlns:mc="http://schemas.openxmlformats.org/markup-compatibility/2006">
-        <mc:Choice xmlns:a14="http://schemas.microsoft.com/office/drawing/2010/main" Requires="a14">
+      <mc:AlternateContent xmlns:mc="http://schemas.openxmlformats.org/markup-compatibility/2006" xmlns:a14="http://schemas.microsoft.com/office/drawing/2010/main">
+        <mc:Choice Requires="a14">
           <p:sp>
             <p:nvSpPr>
               <p:cNvPr id="39" name="TextBox 38">
@@ -9322,7 +9399,7 @@
             </p:txBody>
           </p:sp>
         </mc:Choice>
-        <mc:Fallback>
+        <mc:Fallback xmlns="">
           <p:sp>
             <p:nvSpPr>
               <p:cNvPr id="39" name="TextBox 38">
